--- a/recruitment-report-builder/demo/demo-report.pptx
+++ b/recruitment-report-builder/demo/demo-report.pptx
@@ -3646,7 +3646,7 @@
                 </a:solidFill>
                 <a:latin typeface="Meiryo"/>
               </a:rPr>
-              <a:t>作成日: 2026-07-13</a:t>
+              <a:t>作成日: 2026-07-14</a:t>
             </a:r>
           </a:p>
         </p:txBody>
